--- a/assets/ppt/slidebuilder/template-slide-grafico.pptx
+++ b/assets/ppt/slidebuilder/template-slide-grafico.pptx
@@ -215,7 +215,7 @@
           <a:p>
             <a:fld id="{B3A3BE28-0A3D-4C41-9CFE-3C7416B26FD2}" type="datetimeFigureOut">
               <a:rPr lang="it-IT" smtClean="0"/>
-              <a:t>04/06/2026</a:t>
+              <a:t>05/06/2026</a:t>
             </a:fld>
             <a:endParaRPr lang="it-IT"/>
           </a:p>
@@ -392,7 +392,7 @@
           <a:p>
             <a:fld id="{3D8E8EC0-B44D-4781-8E7E-0E122DC59412}" type="datetimeFigureOut">
               <a:rPr lang="it-IT" smtClean="0"/>
-              <a:t>04/06/2026</a:t>
+              <a:t>05/06/2026</a:t>
             </a:fld>
             <a:endParaRPr lang="it-IT"/>
           </a:p>
@@ -1545,6 +1545,347 @@
           <a:chExt cx="0" cy="0"/>
         </a:xfrm>
       </p:grpSpPr>
+      <p:pic>
+        <p:nvPicPr>
+          <p:cNvPr id="237" name="Elemento grafico 236">
+            <a:extLst>
+              <a:ext uri="{FF2B5EF4-FFF2-40B4-BE49-F238E27FC236}">
+                <a16:creationId xmlns:a16="http://schemas.microsoft.com/office/drawing/2014/main" id="{2482FF74-D60B-31D0-7939-ED33EF74F331}"/>
+              </a:ext>
+            </a:extLst>
+          </p:cNvPr>
+          <p:cNvPicPr>
+            <a:picLocks noChangeAspect="1"/>
+          </p:cNvPicPr>
+          <p:nvPr userDrawn="1"/>
+        </p:nvPicPr>
+        <p:blipFill>
+          <a:blip>
+            <a:extLst>
+              <a:ext uri="{96DAC541-7B7A-43D3-8B79-37D633B846F1}">
+                <asvg:svgBlip xmlns:asvg="http://schemas.microsoft.com/office/drawing/2016/SVG/main" r:embed="rId15"/>
+              </a:ext>
+            </a:extLst>
+          </a:blip>
+          <a:stretch>
+            <a:fillRect/>
+          </a:stretch>
+        </p:blipFill>
+        <p:spPr>
+          <a:xfrm>
+            <a:off x="10824140" y="6452341"/>
+            <a:ext cx="1190061" cy="226392"/>
+          </a:xfrm>
+          <a:prstGeom prst="rect">
+            <a:avLst/>
+          </a:prstGeom>
+        </p:spPr>
+      </p:pic>
+      <p:sp>
+        <p:nvSpPr>
+          <p:cNvPr id="238" name="object 4">
+            <a:extLst>
+              <a:ext uri="{FF2B5EF4-FFF2-40B4-BE49-F238E27FC236}">
+                <a16:creationId xmlns:a16="http://schemas.microsoft.com/office/drawing/2014/main" id="{889A9BC2-1F0E-619D-31A1-79BC9298952B}"/>
+              </a:ext>
+            </a:extLst>
+          </p:cNvPr>
+          <p:cNvSpPr txBox="1">
+            <a:spLocks/>
+          </p:cNvSpPr>
+          <p:nvPr userDrawn="1"/>
+        </p:nvSpPr>
+        <p:spPr>
+          <a:xfrm>
+            <a:off x="66675" y="6566004"/>
+            <a:ext cx="1658151" cy="120546"/>
+          </a:xfrm>
+          <a:prstGeom prst="rect">
+            <a:avLst/>
+          </a:prstGeom>
+        </p:spPr>
+        <p:txBody>
+          <a:bodyPr vert="horz" wrap="square" lIns="0" tIns="12700" rIns="0" bIns="0" rtlCol="0">
+            <a:spAutoFit/>
+          </a:bodyPr>
+          <a:lstStyle/>
+          <a:p>
+            <a:pPr marL="12700" marR="0" lvl="0" indent="0" algn="r" defTabSz="914400" rtl="0" eaLnBrk="1" fontAlgn="auto" latinLnBrk="0" hangingPunct="1">
+              <a:lnSpc>
+                <a:spcPct val="100000"/>
+              </a:lnSpc>
+              <a:spcBef>
+                <a:spcPts val="100"/>
+              </a:spcBef>
+              <a:spcAft>
+                <a:spcPts val="0"/>
+              </a:spcAft>
+              <a:buClrTx/>
+              <a:buSzTx/>
+              <a:buFontTx/>
+              <a:buNone/>
+              <a:tabLst/>
+              <a:defRPr/>
+            </a:pPr>
+            <a:r>
+              <a:rPr kumimoji="0" sz="700" b="0" i="0" u="none" strike="noStrike" kern="1200" cap="none" spc="0" normalizeH="0" baseline="0" noProof="0" dirty="0">
+                <a:ln>
+                  <a:noFill/>
+                </a:ln>
+                <a:solidFill>
+                  <a:schemeClr val="bg2">
+                    <a:lumMod val="25000"/>
+                  </a:schemeClr>
+                </a:solidFill>
+                <a:effectLst/>
+                <a:uLnTx/>
+                <a:uFillTx/>
+                <a:latin typeface="Manrope" pitchFamily="2" charset="0"/>
+                <a:cs typeface="Arial"/>
+              </a:rPr>
+              <a:t>© </a:t>
+            </a:r>
+            <a:r>
+              <a:rPr kumimoji="0" sz="700" b="0" i="0" u="none" strike="noStrike" kern="1200" cap="none" spc="-5" normalizeH="0" baseline="0" noProof="0" dirty="0">
+                <a:ln>
+                  <a:noFill/>
+                </a:ln>
+                <a:solidFill>
+                  <a:schemeClr val="bg2">
+                    <a:lumMod val="25000"/>
+                  </a:schemeClr>
+                </a:solidFill>
+                <a:effectLst/>
+                <a:uLnTx/>
+                <a:uFillTx/>
+                <a:latin typeface="Manrope" pitchFamily="2" charset="0"/>
+                <a:cs typeface="Arial"/>
+              </a:rPr>
+              <a:t>202</a:t>
+            </a:r>
+            <a:r>
+              <a:rPr lang="it-IT" sz="700" spc="-5" dirty="0">
+                <a:solidFill>
+                  <a:schemeClr val="bg2">
+                    <a:lumMod val="25000"/>
+                  </a:schemeClr>
+                </a:solidFill>
+                <a:latin typeface="Manrope" pitchFamily="2" charset="0"/>
+                <a:cs typeface="Arial"/>
+              </a:rPr>
+              <a:t>6</a:t>
+            </a:r>
+            <a:r>
+              <a:rPr kumimoji="0" sz="700" b="0" i="0" u="none" strike="noStrike" kern="1200" cap="none" spc="-5" normalizeH="0" baseline="0" noProof="0" dirty="0">
+                <a:ln>
+                  <a:noFill/>
+                </a:ln>
+                <a:solidFill>
+                  <a:schemeClr val="bg2">
+                    <a:lumMod val="25000"/>
+                  </a:schemeClr>
+                </a:solidFill>
+                <a:effectLst/>
+                <a:uLnTx/>
+                <a:uFillTx/>
+                <a:latin typeface="Manrope" pitchFamily="2" charset="0"/>
+                <a:cs typeface="Arial"/>
+              </a:rPr>
+              <a:t> </a:t>
+            </a:r>
+            <a:r>
+              <a:rPr kumimoji="0" lang="it-IT" sz="700" b="0" i="0" u="none" strike="noStrike" kern="1200" cap="none" spc="-5" normalizeH="0" baseline="0" noProof="0" dirty="0">
+                <a:ln>
+                  <a:noFill/>
+                </a:ln>
+                <a:solidFill>
+                  <a:schemeClr val="bg2">
+                    <a:lumMod val="25000"/>
+                  </a:schemeClr>
+                </a:solidFill>
+                <a:effectLst/>
+                <a:uLnTx/>
+                <a:uFillTx/>
+                <a:latin typeface="Manrope" pitchFamily="2" charset="0"/>
+                <a:cs typeface="Arial"/>
+              </a:rPr>
+              <a:t>Abitare Co</a:t>
+            </a:r>
+            <a:r>
+              <a:rPr kumimoji="0" sz="700" b="0" i="0" u="none" strike="noStrike" kern="1200" cap="none" spc="0" normalizeH="0" baseline="0" noProof="0" dirty="0">
+                <a:ln>
+                  <a:noFill/>
+                </a:ln>
+                <a:solidFill>
+                  <a:schemeClr val="bg2">
+                    <a:lumMod val="25000"/>
+                  </a:schemeClr>
+                </a:solidFill>
+                <a:effectLst/>
+                <a:uLnTx/>
+                <a:uFillTx/>
+                <a:latin typeface="Manrope" pitchFamily="2" charset="0"/>
+                <a:cs typeface="Arial"/>
+              </a:rPr>
+              <a:t>. </a:t>
+            </a:r>
+            <a:r>
+              <a:rPr kumimoji="0" lang="it-IT" sz="700" b="0" i="0" u="none" strike="noStrike" kern="1200" cap="none" spc="0" normalizeH="0" baseline="0" noProof="0" dirty="0">
+                <a:ln>
+                  <a:noFill/>
+                </a:ln>
+                <a:solidFill>
+                  <a:schemeClr val="bg2">
+                    <a:lumMod val="25000"/>
+                  </a:schemeClr>
+                </a:solidFill>
+                <a:effectLst/>
+                <a:uLnTx/>
+                <a:uFillTx/>
+                <a:latin typeface="Manrope" pitchFamily="2" charset="0"/>
+                <a:cs typeface="Arial"/>
+              </a:rPr>
+              <a:t>| </a:t>
+            </a:r>
+            <a:r>
+              <a:rPr kumimoji="0" sz="700" b="0" i="0" u="none" strike="noStrike" kern="1200" cap="none" spc="0" normalizeH="0" baseline="0" noProof="0" dirty="0">
+                <a:ln>
+                  <a:noFill/>
+                </a:ln>
+                <a:solidFill>
+                  <a:schemeClr val="bg2">
+                    <a:lumMod val="25000"/>
+                  </a:schemeClr>
+                </a:solidFill>
+                <a:effectLst/>
+                <a:uLnTx/>
+                <a:uFillTx/>
+                <a:latin typeface="Manrope" pitchFamily="2" charset="0"/>
+                <a:cs typeface="Arial"/>
+              </a:rPr>
+              <a:t>All </a:t>
+            </a:r>
+            <a:r>
+              <a:rPr kumimoji="0" sz="700" b="0" i="0" u="none" strike="noStrike" kern="1200" cap="none" spc="-5" normalizeH="0" baseline="0" noProof="0" dirty="0">
+                <a:ln>
+                  <a:noFill/>
+                </a:ln>
+                <a:solidFill>
+                  <a:schemeClr val="bg2">
+                    <a:lumMod val="25000"/>
+                  </a:schemeClr>
+                </a:solidFill>
+                <a:effectLst/>
+                <a:uLnTx/>
+                <a:uFillTx/>
+                <a:latin typeface="Manrope" pitchFamily="2" charset="0"/>
+                <a:cs typeface="Arial"/>
+              </a:rPr>
+              <a:t>rights</a:t>
+            </a:r>
+            <a:r>
+              <a:rPr kumimoji="0" sz="700" b="0" i="0" u="none" strike="noStrike" kern="1200" cap="none" spc="105" normalizeH="0" baseline="0" noProof="0" dirty="0">
+                <a:ln>
+                  <a:noFill/>
+                </a:ln>
+                <a:solidFill>
+                  <a:schemeClr val="bg2">
+                    <a:lumMod val="25000"/>
+                  </a:schemeClr>
+                </a:solidFill>
+                <a:effectLst/>
+                <a:uLnTx/>
+                <a:uFillTx/>
+                <a:latin typeface="Manrope" pitchFamily="2" charset="0"/>
+                <a:cs typeface="Arial"/>
+              </a:rPr>
+              <a:t> </a:t>
+            </a:r>
+            <a:r>
+              <a:rPr kumimoji="0" sz="700" b="0" i="0" u="none" strike="noStrike" kern="1200" cap="none" spc="-5" normalizeH="0" baseline="0" noProof="0" dirty="0">
+                <a:ln>
+                  <a:noFill/>
+                </a:ln>
+                <a:solidFill>
+                  <a:schemeClr val="bg2">
+                    <a:lumMod val="25000"/>
+                  </a:schemeClr>
+                </a:solidFill>
+                <a:effectLst/>
+                <a:uLnTx/>
+                <a:uFillTx/>
+                <a:latin typeface="Manrope" pitchFamily="2" charset="0"/>
+                <a:cs typeface="Arial"/>
+              </a:rPr>
+              <a:t>reserved.</a:t>
+            </a:r>
+            <a:endParaRPr kumimoji="0" sz="700" b="0" i="0" u="none" strike="noStrike" kern="1200" cap="none" spc="0" normalizeH="0" baseline="0" noProof="0" dirty="0">
+              <a:ln>
+                <a:noFill/>
+              </a:ln>
+              <a:solidFill>
+                <a:schemeClr val="bg2">
+                  <a:lumMod val="25000"/>
+                </a:schemeClr>
+              </a:solidFill>
+              <a:effectLst/>
+              <a:uLnTx/>
+              <a:uFillTx/>
+              <a:latin typeface="Manrope" pitchFamily="2" charset="0"/>
+              <a:cs typeface="Arial"/>
+            </a:endParaRPr>
+          </a:p>
+        </p:txBody>
+      </p:sp>
+      <p:sp>
+        <p:nvSpPr>
+          <p:cNvPr id="3" name="CasellaDiTesto 2">
+            <a:extLst>
+              <a:ext uri="{FF2B5EF4-FFF2-40B4-BE49-F238E27FC236}">
+                <a16:creationId xmlns:a16="http://schemas.microsoft.com/office/drawing/2014/main" id="{E1F29B3F-D7BA-0B9E-666C-B3073436EBEF}"/>
+              </a:ext>
+            </a:extLst>
+          </p:cNvPr>
+          <p:cNvSpPr txBox="1">
+            <a:spLocks/>
+          </p:cNvSpPr>
+          <p:nvPr userDrawn="1"/>
+        </p:nvSpPr>
+        <p:spPr>
+          <a:xfrm>
+            <a:off x="1658657" y="6497407"/>
+            <a:ext cx="464628" cy="237181"/>
+          </a:xfrm>
+          <a:prstGeom prst="rect">
+            <a:avLst/>
+          </a:prstGeom>
+          <a:noFill/>
+        </p:spPr>
+        <p:txBody>
+          <a:bodyPr wrap="square">
+            <a:spAutoFit/>
+          </a:bodyPr>
+          <a:lstStyle/>
+          <a:p>
+            <a:pPr>
+              <a:lnSpc>
+                <a:spcPct val="150000"/>
+              </a:lnSpc>
+            </a:pPr>
+            <a:r>
+              <a:rPr lang="it-IT" sz="700" dirty="0">
+                <a:solidFill>
+                  <a:schemeClr val="bg2">
+                    <a:lumMod val="25000"/>
+                  </a:schemeClr>
+                </a:solidFill>
+                <a:latin typeface="Manrope" pitchFamily="2" charset="0"/>
+              </a:rPr>
+              <a:t>Fonte:</a:t>
+            </a:r>
+          </a:p>
+        </p:txBody>
+      </p:sp>
     </p:spTree>
     <p:extLst>
       <p:ext uri="{BB962C8B-B14F-4D97-AF65-F5344CB8AC3E}">
@@ -1898,298 +2239,6 @@
           <a:chExt cx="0" cy="0"/>
         </a:xfrm>
       </p:grpSpPr>
-      <p:pic>
-        <p:nvPicPr>
-          <p:cNvPr id="237" name="Elemento grafico 236">
-            <a:extLst>
-              <a:ext uri="{FF2B5EF4-FFF2-40B4-BE49-F238E27FC236}">
-                <a16:creationId xmlns:a16="http://schemas.microsoft.com/office/drawing/2014/main" id="{2482FF74-D60B-31D0-7939-ED33EF74F331}"/>
-              </a:ext>
-            </a:extLst>
-          </p:cNvPr>
-          <p:cNvPicPr>
-            <a:picLocks noGrp="1" noRot="1" noChangeAspect="1" noMove="1" noResize="1" noEditPoints="1" noAdjustHandles="1" noChangeArrowheads="1" noChangeShapeType="1" noCrop="1"/>
-          </p:cNvPicPr>
-          <p:nvPr/>
-        </p:nvPicPr>
-        <p:blipFill>
-          <a:blip>
-            <a:extLst>
-              <a:ext uri="{96DAC541-7B7A-43D3-8B79-37D633B846F1}">
-                <asvg:svgBlip xmlns:asvg="http://schemas.microsoft.com/office/drawing/2016/SVG/main" r:embed="rId2"/>
-              </a:ext>
-            </a:extLst>
-          </a:blip>
-          <a:stretch>
-            <a:fillRect/>
-          </a:stretch>
-        </p:blipFill>
-        <p:spPr>
-          <a:xfrm>
-            <a:off x="10824140" y="6452341"/>
-            <a:ext cx="1190061" cy="226392"/>
-          </a:xfrm>
-          <a:prstGeom prst="rect">
-            <a:avLst/>
-          </a:prstGeom>
-        </p:spPr>
-      </p:pic>
-      <p:sp>
-        <p:nvSpPr>
-          <p:cNvPr id="238" name="object 4">
-            <a:extLst>
-              <a:ext uri="{FF2B5EF4-FFF2-40B4-BE49-F238E27FC236}">
-                <a16:creationId xmlns:a16="http://schemas.microsoft.com/office/drawing/2014/main" id="{889A9BC2-1F0E-619D-31A1-79BC9298952B}"/>
-              </a:ext>
-            </a:extLst>
-          </p:cNvPr>
-          <p:cNvSpPr txBox="1">
-            <a:spLocks noGrp="1" noRot="1" noMove="1" noResize="1" noEditPoints="1" noAdjustHandles="1" noChangeArrowheads="1" noChangeShapeType="1"/>
-          </p:cNvSpPr>
-          <p:nvPr/>
-        </p:nvSpPr>
-        <p:spPr>
-          <a:xfrm>
-            <a:off x="66675" y="6566004"/>
-            <a:ext cx="1658151" cy="120546"/>
-          </a:xfrm>
-          <a:prstGeom prst="rect">
-            <a:avLst/>
-          </a:prstGeom>
-        </p:spPr>
-        <p:txBody>
-          <a:bodyPr vert="horz" wrap="square" lIns="0" tIns="12700" rIns="0" bIns="0" rtlCol="0">
-            <a:spAutoFit/>
-          </a:bodyPr>
-          <a:lstStyle/>
-          <a:p>
-            <a:pPr marL="12700" marR="0" lvl="0" indent="0" algn="r" defTabSz="914400" rtl="0" eaLnBrk="1" fontAlgn="auto" latinLnBrk="0" hangingPunct="1">
-              <a:lnSpc>
-                <a:spcPct val="100000"/>
-              </a:lnSpc>
-              <a:spcBef>
-                <a:spcPts val="100"/>
-              </a:spcBef>
-              <a:spcAft>
-                <a:spcPts val="0"/>
-              </a:spcAft>
-              <a:buClrTx/>
-              <a:buSzTx/>
-              <a:buFontTx/>
-              <a:buNone/>
-              <a:tabLst/>
-              <a:defRPr/>
-            </a:pPr>
-            <a:r>
-              <a:rPr kumimoji="0" sz="700" b="0" i="0" u="none" strike="noStrike" kern="1200" cap="none" spc="0" normalizeH="0" baseline="0" noProof="0" dirty="0">
-                <a:ln>
-                  <a:noFill/>
-                </a:ln>
-                <a:solidFill>
-                  <a:schemeClr val="bg2">
-                    <a:lumMod val="25000"/>
-                  </a:schemeClr>
-                </a:solidFill>
-                <a:effectLst/>
-                <a:uLnTx/>
-                <a:uFillTx/>
-                <a:latin typeface="Manrope" pitchFamily="2" charset="0"/>
-                <a:cs typeface="Arial"/>
-              </a:rPr>
-              <a:t>© </a:t>
-            </a:r>
-            <a:r>
-              <a:rPr kumimoji="0" sz="700" b="0" i="0" u="none" strike="noStrike" kern="1200" cap="none" spc="-5" normalizeH="0" baseline="0" noProof="0" dirty="0">
-                <a:ln>
-                  <a:noFill/>
-                </a:ln>
-                <a:solidFill>
-                  <a:schemeClr val="bg2">
-                    <a:lumMod val="25000"/>
-                  </a:schemeClr>
-                </a:solidFill>
-                <a:effectLst/>
-                <a:uLnTx/>
-                <a:uFillTx/>
-                <a:latin typeface="Manrope" pitchFamily="2" charset="0"/>
-                <a:cs typeface="Arial"/>
-              </a:rPr>
-              <a:t>202</a:t>
-            </a:r>
-            <a:r>
-              <a:rPr lang="it-IT" sz="700" spc="-5" dirty="0">
-                <a:solidFill>
-                  <a:schemeClr val="bg2">
-                    <a:lumMod val="25000"/>
-                  </a:schemeClr>
-                </a:solidFill>
-                <a:latin typeface="Manrope" pitchFamily="2" charset="0"/>
-                <a:cs typeface="Arial"/>
-              </a:rPr>
-              <a:t>6</a:t>
-            </a:r>
-            <a:r>
-              <a:rPr kumimoji="0" sz="700" b="0" i="0" u="none" strike="noStrike" kern="1200" cap="none" spc="-5" normalizeH="0" baseline="0" noProof="0" dirty="0">
-                <a:ln>
-                  <a:noFill/>
-                </a:ln>
-                <a:solidFill>
-                  <a:schemeClr val="bg2">
-                    <a:lumMod val="25000"/>
-                  </a:schemeClr>
-                </a:solidFill>
-                <a:effectLst/>
-                <a:uLnTx/>
-                <a:uFillTx/>
-                <a:latin typeface="Manrope" pitchFamily="2" charset="0"/>
-                <a:cs typeface="Arial"/>
-              </a:rPr>
-              <a:t> </a:t>
-            </a:r>
-            <a:r>
-              <a:rPr kumimoji="0" lang="it-IT" sz="700" b="0" i="0" u="none" strike="noStrike" kern="1200" cap="none" spc="-5" normalizeH="0" baseline="0" noProof="0" dirty="0">
-                <a:ln>
-                  <a:noFill/>
-                </a:ln>
-                <a:solidFill>
-                  <a:schemeClr val="bg2">
-                    <a:lumMod val="25000"/>
-                  </a:schemeClr>
-                </a:solidFill>
-                <a:effectLst/>
-                <a:uLnTx/>
-                <a:uFillTx/>
-                <a:latin typeface="Manrope" pitchFamily="2" charset="0"/>
-                <a:cs typeface="Arial"/>
-              </a:rPr>
-              <a:t>Abitare Co</a:t>
-            </a:r>
-            <a:r>
-              <a:rPr kumimoji="0" sz="700" b="0" i="0" u="none" strike="noStrike" kern="1200" cap="none" spc="0" normalizeH="0" baseline="0" noProof="0" dirty="0">
-                <a:ln>
-                  <a:noFill/>
-                </a:ln>
-                <a:solidFill>
-                  <a:schemeClr val="bg2">
-                    <a:lumMod val="25000"/>
-                  </a:schemeClr>
-                </a:solidFill>
-                <a:effectLst/>
-                <a:uLnTx/>
-                <a:uFillTx/>
-                <a:latin typeface="Manrope" pitchFamily="2" charset="0"/>
-                <a:cs typeface="Arial"/>
-              </a:rPr>
-              <a:t>. </a:t>
-            </a:r>
-            <a:r>
-              <a:rPr kumimoji="0" lang="it-IT" sz="700" b="0" i="0" u="none" strike="noStrike" kern="1200" cap="none" spc="0" normalizeH="0" baseline="0" noProof="0" dirty="0">
-                <a:ln>
-                  <a:noFill/>
-                </a:ln>
-                <a:solidFill>
-                  <a:schemeClr val="bg2">
-                    <a:lumMod val="25000"/>
-                  </a:schemeClr>
-                </a:solidFill>
-                <a:effectLst/>
-                <a:uLnTx/>
-                <a:uFillTx/>
-                <a:latin typeface="Manrope" pitchFamily="2" charset="0"/>
-                <a:cs typeface="Arial"/>
-              </a:rPr>
-              <a:t>| </a:t>
-            </a:r>
-            <a:r>
-              <a:rPr kumimoji="0" sz="700" b="0" i="0" u="none" strike="noStrike" kern="1200" cap="none" spc="0" normalizeH="0" baseline="0" noProof="0" dirty="0">
-                <a:ln>
-                  <a:noFill/>
-                </a:ln>
-                <a:solidFill>
-                  <a:schemeClr val="bg2">
-                    <a:lumMod val="25000"/>
-                  </a:schemeClr>
-                </a:solidFill>
-                <a:effectLst/>
-                <a:uLnTx/>
-                <a:uFillTx/>
-                <a:latin typeface="Manrope" pitchFamily="2" charset="0"/>
-                <a:cs typeface="Arial"/>
-              </a:rPr>
-              <a:t>All </a:t>
-            </a:r>
-            <a:r>
-              <a:rPr kumimoji="0" sz="700" b="0" i="0" u="none" strike="noStrike" kern="1200" cap="none" spc="-5" normalizeH="0" baseline="0" noProof="0" dirty="0">
-                <a:ln>
-                  <a:noFill/>
-                </a:ln>
-                <a:solidFill>
-                  <a:schemeClr val="bg2">
-                    <a:lumMod val="25000"/>
-                  </a:schemeClr>
-                </a:solidFill>
-                <a:effectLst/>
-                <a:uLnTx/>
-                <a:uFillTx/>
-                <a:latin typeface="Manrope" pitchFamily="2" charset="0"/>
-                <a:cs typeface="Arial"/>
-              </a:rPr>
-              <a:t>rights</a:t>
-            </a:r>
-            <a:r>
-              <a:rPr kumimoji="0" sz="700" b="0" i="0" u="none" strike="noStrike" kern="1200" cap="none" spc="105" normalizeH="0" baseline="0" noProof="0" dirty="0">
-                <a:ln>
-                  <a:noFill/>
-                </a:ln>
-                <a:solidFill>
-                  <a:schemeClr val="bg2">
-                    <a:lumMod val="25000"/>
-                  </a:schemeClr>
-                </a:solidFill>
-                <a:effectLst/>
-                <a:uLnTx/>
-                <a:uFillTx/>
-                <a:latin typeface="Manrope" pitchFamily="2" charset="0"/>
-                <a:cs typeface="Arial"/>
-              </a:rPr>
-              <a:t> </a:t>
-            </a:r>
-            <a:r>
-              <a:rPr kumimoji="0" sz="700" b="0" i="0" u="none" strike="noStrike" kern="1200" cap="none" spc="-5" normalizeH="0" baseline="0" noProof="0" dirty="0">
-                <a:ln>
-                  <a:noFill/>
-                </a:ln>
-                <a:solidFill>
-                  <a:schemeClr val="bg2">
-                    <a:lumMod val="25000"/>
-                  </a:schemeClr>
-                </a:solidFill>
-                <a:effectLst/>
-                <a:uLnTx/>
-                <a:uFillTx/>
-                <a:latin typeface="Manrope" pitchFamily="2" charset="0"/>
-                <a:cs typeface="Arial"/>
-              </a:rPr>
-              <a:t>reserved.</a:t>
-            </a:r>
-            <a:endParaRPr kumimoji="0" sz="700" b="0" i="0" u="none" strike="noStrike" kern="1200" cap="none" spc="0" normalizeH="0" baseline="0" noProof="0" dirty="0">
-              <a:ln>
-                <a:noFill/>
-              </a:ln>
-              <a:solidFill>
-                <a:schemeClr val="bg2">
-                  <a:lumMod val="25000"/>
-                </a:schemeClr>
-              </a:solidFill>
-              <a:effectLst/>
-              <a:uLnTx/>
-              <a:uFillTx/>
-              <a:latin typeface="Manrope" pitchFamily="2" charset="0"/>
-              <a:cs typeface="Arial"/>
-            </a:endParaRPr>
-          </a:p>
-        </p:txBody>
-      </p:sp>
       <p:sp>
         <p:nvSpPr>
           <p:cNvPr id="4" name="Rectangle 108">
@@ -2488,55 +2537,6 @@
               <a:latin typeface="PP Pangaia Italic" pitchFamily="50" charset="0"/>
               <a:cs typeface="PP Pangaia Italic" pitchFamily="50" charset="0"/>
             </a:endParaRPr>
-          </a:p>
-        </p:txBody>
-      </p:sp>
-      <p:sp>
-        <p:nvSpPr>
-          <p:cNvPr id="3" name="CasellaDiTesto 2">
-            <a:extLst>
-              <a:ext uri="{FF2B5EF4-FFF2-40B4-BE49-F238E27FC236}">
-                <a16:creationId xmlns:a16="http://schemas.microsoft.com/office/drawing/2014/main" id="{E1F29B3F-D7BA-0B9E-666C-B3073436EBEF}"/>
-              </a:ext>
-            </a:extLst>
-          </p:cNvPr>
-          <p:cNvSpPr txBox="1">
-            <a:spLocks noGrp="1" noRot="1" noMove="1" noResize="1" noEditPoints="1" noAdjustHandles="1" noChangeArrowheads="1" noChangeShapeType="1"/>
-          </p:cNvSpPr>
-          <p:nvPr/>
-        </p:nvSpPr>
-        <p:spPr>
-          <a:xfrm>
-            <a:off x="1658657" y="6497407"/>
-            <a:ext cx="464628" cy="237181"/>
-          </a:xfrm>
-          <a:prstGeom prst="rect">
-            <a:avLst/>
-          </a:prstGeom>
-          <a:noFill/>
-        </p:spPr>
-        <p:txBody>
-          <a:bodyPr wrap="square">
-            <a:spAutoFit/>
-          </a:bodyPr>
-          <a:lstStyle/>
-          <a:p>
-            <a:pPr>
-              <a:lnSpc>
-                <a:spcPct val="150000"/>
-              </a:lnSpc>
-            </a:pPr>
-            <a:r>
-              <a:rPr lang="it-IT" sz="700" dirty="0">
-                <a:solidFill>
-                  <a:schemeClr val="bg2">
-                    <a:lumMod val="25000"/>
-                  </a:schemeClr>
-                </a:solidFill>
-                <a:latin typeface="Manrope" pitchFamily="2" charset="0"/>
-              </a:rPr>
-              <a:t>Fonte:</a:t>
-            </a:r>
           </a:p>
         </p:txBody>
       </p:sp>
